--- a/生成的课件/第6章  市场结构和企业行为.pptx
+++ b/生成的课件/第6章  市场结构和企业行为.pptx
@@ -4067,7 +4067,7 @@
                 <a:latin typeface="Times New Roman"/>
                 <a:ea typeface="宋体"/>
               </a:rPr>
-              <a:t>  1. 垄断厂商的定价与产出决策</a:t>
+              <a:t>1. 垄断厂商的定价与产出决策</a:t>
             </a:r>
           </a:p>
         </p:txBody>
@@ -4110,7 +4110,7 @@
                 <a:latin typeface="Times New Roman"/>
                 <a:ea typeface="宋体"/>
               </a:rPr>
-              <a:t>（1）下倾的需求曲线： </a:t>
+              <a:t>（1）下倾的需求曲线：</a:t>
             </a:r>
             <a:r>
               <a:rPr sz="1250" b="0">
@@ -4140,7 +4140,7 @@
                 <a:latin typeface="Times New Roman"/>
                 <a:ea typeface="宋体"/>
               </a:rPr>
-              <a:t>（2）利润最大化定价： </a:t>
+              <a:t>（2）利润最大化定价：</a:t>
             </a:r>
             <a:r>
               <a:rPr sz="1250" b="0">
@@ -4170,7 +4170,7 @@
                 <a:latin typeface="Times New Roman"/>
                 <a:ea typeface="宋体"/>
               </a:rPr>
-              <a:t>（3）勒纳垄断势力指数： </a:t>
+              <a:t>（3）勒纳垄断势力指数：</a:t>
             </a:r>
             <a:r>
               <a:rPr sz="1250" b="0">
@@ -4180,7 +4180,7 @@
                 <a:latin typeface="Times New Roman"/>
                 <a:ea typeface="宋体"/>
               </a:rPr>
-              <a:t>L = \frac{P - MC}{P} = \frac{1}{|E_p|} \quad (价格偏离边际成本的溢价程度与需求价格弹性成反比！)</a:t>
+              <a:t>L = (P - MC) / P = 1 / (|Ep|) (价格偏离边际成本的溢价程度与需求价格弹性成反比！)</a:t>
             </a:r>
           </a:p>
         </p:txBody>
@@ -4280,7 +4280,7 @@
                 <a:latin typeface="Times New Roman"/>
                 <a:ea typeface="宋体"/>
               </a:rPr>
-              <a:t>  2. 垄断三大社会经济弊端与案例6-1</a:t>
+              <a:t>2. 垄断三大社会经济弊端与案例6-1</a:t>
             </a:r>
           </a:p>
         </p:txBody>
@@ -4323,7 +4323,7 @@
                 <a:latin typeface="Times New Roman"/>
                 <a:ea typeface="宋体"/>
               </a:rPr>
-              <a:t>（1）资源配置低效（无谓损失 DWL）： </a:t>
+              <a:t>（1）资源配置低效（无谓损失 DWL）：</a:t>
             </a:r>
             <a:r>
               <a:rPr sz="1250" b="0">
@@ -4353,7 +4353,7 @@
                 <a:latin typeface="Times New Roman"/>
                 <a:ea typeface="宋体"/>
               </a:rPr>
-              <a:t>（2）缺乏创新动力与 X-非效率： </a:t>
+              <a:t>（2）缺乏创新动力与 X-非效率：</a:t>
             </a:r>
             <a:r>
               <a:rPr sz="1250" b="0">
@@ -4383,7 +4383,7 @@
                 <a:latin typeface="Times New Roman"/>
                 <a:ea typeface="宋体"/>
               </a:rPr>
-              <a:t>（3）寻租腐败浪费： </a:t>
+              <a:t>（3）寻租腐败浪费：</a:t>
             </a:r>
             <a:r>
               <a:rPr sz="1250" b="0">
@@ -4450,7 +4450,7 @@
                 <a:latin typeface="Times New Roman"/>
                 <a:ea typeface="宋体"/>
               </a:rPr>
-              <a:t>  ★ 核心要点：完全垄断以牺牲消费者剩余为代价攫取超额垄断利润，是各国反垄断法强力规制的对象。</a:t>
+              <a:t>★ 核心要点：完全垄断以牺牲消费者剩余为代价攫取超额垄断利润，是各国反垄断法强力规制的对象。</a:t>
             </a:r>
           </a:p>
         </p:txBody>
@@ -5164,7 +5164,7 @@
                 <a:latin typeface="Times New Roman"/>
                 <a:ea typeface="宋体"/>
               </a:rPr>
-              <a:t>  1. 垄断竞争三大核心特征</a:t>
+              <a:t>1. 垄断竞争三大核心特征</a:t>
             </a:r>
           </a:p>
         </p:txBody>
@@ -5207,7 +5207,7 @@
                 <a:latin typeface="Times New Roman"/>
                 <a:ea typeface="宋体"/>
               </a:rPr>
-              <a:t>（1）厂商数目众多： </a:t>
+              <a:t>（1）厂商数目众多：</a:t>
             </a:r>
             <a:r>
               <a:rPr sz="1250" b="0">
@@ -5237,7 +5237,7 @@
                 <a:latin typeface="Times New Roman"/>
                 <a:ea typeface="宋体"/>
               </a:rPr>
-              <a:t>（2）产品具有差异性（核心）： </a:t>
+              <a:t>（2）产品具有差异性（核心）：</a:t>
             </a:r>
             <a:r>
               <a:rPr sz="1250" b="0">
@@ -5267,7 +5267,7 @@
                 <a:latin typeface="Times New Roman"/>
                 <a:ea typeface="宋体"/>
               </a:rPr>
-              <a:t>（3）进出壁垒较低： </a:t>
+              <a:t>（3）进出壁垒较低：</a:t>
             </a:r>
             <a:r>
               <a:rPr sz="1250" b="0">
@@ -5377,7 +5377,7 @@
                 <a:latin typeface="Times New Roman"/>
                 <a:ea typeface="宋体"/>
               </a:rPr>
-              <a:t>  2. 长期均衡演进与过剩产能（Excess Capacity）</a:t>
+              <a:t>2. 长期均衡演进与过剩产能（Excess Capacity）</a:t>
             </a:r>
           </a:p>
         </p:txBody>
@@ -5420,7 +5420,7 @@
                 <a:latin typeface="Times New Roman"/>
                 <a:ea typeface="宋体"/>
               </a:rPr>
-              <a:t>（1）长期超额利润归零： </a:t>
+              <a:t>（1）长期超额利润归零：</a:t>
             </a:r>
             <a:r>
               <a:rPr sz="1250" b="0">
@@ -5430,7 +5430,7 @@
                 <a:latin typeface="Times New Roman"/>
                 <a:ea typeface="宋体"/>
               </a:rPr>
-              <a:t>长期内新品牌不断涌入，使每家厂商面临的主观需求曲线向左下方平移并变得更平坦，直至需求曲线与 LAC 曲线相切（P = LAC, \pi = 0）。</a:t>
+              <a:t>长期内新品牌不断涌入，使每家厂商面临的主观需求曲线向左下方平移并变得更平坦，直至需求曲线与 LAC 曲线相切（P = LAC, π = 0）。</a:t>
             </a:r>
           </a:p>
           <a:p>
@@ -5450,7 +5450,7 @@
                 <a:latin typeface="Times New Roman"/>
                 <a:ea typeface="宋体"/>
               </a:rPr>
-              <a:t>（2）过剩产能存在定理： </a:t>
+              <a:t>（2）过剩产能存在定理：</a:t>
             </a:r>
             <a:r>
               <a:rPr sz="1250" b="0">
@@ -5480,7 +5480,7 @@
                 <a:latin typeface="Times New Roman"/>
                 <a:ea typeface="宋体"/>
               </a:rPr>
-              <a:t>（3）多样性福利补偿： </a:t>
+              <a:t>（3）多样性福利补偿：</a:t>
             </a:r>
             <a:r>
               <a:rPr sz="1250" b="0">
@@ -5547,7 +5547,7 @@
                 <a:latin typeface="Times New Roman"/>
                 <a:ea typeface="宋体"/>
               </a:rPr>
-              <a:t>  ★ 核心要点：垄断竞争的过剩产能是人类社会为了享受消费多样性与个性化体验所支付的合理'多样性溢价'。</a:t>
+              <a:t>★ 核心要点：垄断竞争的过剩产能是人类社会为了享受消费多样性与个性化体验所支付的合理'多样性溢价'。</a:t>
             </a:r>
           </a:p>
         </p:txBody>
@@ -5954,7 +5954,7 @@
                 <a:latin typeface="Times New Roman"/>
                 <a:ea typeface="宋体"/>
               </a:rPr>
-              <a:t>  1. 非价格竞争三大核心手段</a:t>
+              <a:t>1. 非价格竞争三大核心手段</a:t>
             </a:r>
           </a:p>
         </p:txBody>
@@ -5997,7 +5997,7 @@
                 <a:latin typeface="Times New Roman"/>
                 <a:ea typeface="宋体"/>
               </a:rPr>
-              <a:t>（1）产品品质与设计差异化： </a:t>
+              <a:t>（1）产品品质与设计差异化：</a:t>
             </a:r>
             <a:r>
               <a:rPr sz="1250" b="0">
@@ -6027,7 +6027,7 @@
                 <a:latin typeface="Times New Roman"/>
                 <a:ea typeface="宋体"/>
               </a:rPr>
-              <a:t>（2）销售渠道与服务差异化： </a:t>
+              <a:t>（2）销售渠道与服务差异化：</a:t>
             </a:r>
             <a:r>
               <a:rPr sz="1250" b="0">
@@ -6057,7 +6057,7 @@
                 <a:latin typeface="Times New Roman"/>
                 <a:ea typeface="宋体"/>
               </a:rPr>
-              <a:t>（3）品牌形象塑造与心理溢价： </a:t>
+              <a:t>（3）品牌形象塑造与心理溢价：</a:t>
             </a:r>
             <a:r>
               <a:rPr sz="1250" b="0">
@@ -6167,7 +6167,7 @@
                 <a:latin typeface="Times New Roman"/>
                 <a:ea typeface="宋体"/>
               </a:rPr>
-              <a:t>  2. 多尔夫曼-斯泰纳广告定理实操（例6-2/6-3）</a:t>
+              <a:t>2. 多尔夫曼-斯泰纳广告定理实操（例6-2/6-3）</a:t>
             </a:r>
           </a:p>
         </p:txBody>
@@ -6210,7 +6210,7 @@
                 <a:latin typeface="Times New Roman"/>
                 <a:ea typeface="宋体"/>
               </a:rPr>
-              <a:t>（1）最优广告占比定理： </a:t>
+              <a:t>（1）最优广告占比定理：</a:t>
             </a:r>
             <a:r>
               <a:rPr sz="1250" b="0">
@@ -6220,7 +6220,7 @@
                 <a:latin typeface="Times New Roman"/>
                 <a:ea typeface="宋体"/>
               </a:rPr>
-              <a:t>\frac{A^*}{TR} = \frac{E_a}{|E_p|} \quad (广告费占营收比重 = 广告弹性 / 价格弹性绝对值)</a:t>
+              <a:t>(A*) / TR = (Ea) / (|Ep|) (广告费占营收比重 = 广告弹性 / 价格弹性绝对值)</a:t>
             </a:r>
           </a:p>
           <a:p>
@@ -6240,7 +6240,7 @@
                 <a:latin typeface="Times New Roman"/>
                 <a:ea typeface="宋体"/>
               </a:rPr>
-              <a:t>（2）垄断竞争企业实操： </a:t>
+              <a:t>（2）垄断竞争企业实操：</a:t>
             </a:r>
             <a:r>
               <a:rPr sz="1250" b="0">
@@ -6250,7 +6250,7 @@
                 <a:latin typeface="Times New Roman"/>
                 <a:ea typeface="宋体"/>
               </a:rPr>
-              <a:t>由于产品具有差异性（|E_p| 较小）且受品牌认知影响大（E_a 较高），垄断竞争企业普遍比完全竞争企业更热衷于进行高强度的广告营销投入！</a:t>
+              <a:t>由于产品具有差异性（|Ep| 较小）且受品牌认知影响大（Ea 较高），垄断竞争企业普遍比完全竞争企业更热衷于进行高强度的广告营销投入！</a:t>
             </a:r>
           </a:p>
         </p:txBody>
@@ -6307,7 +6307,7 @@
                 <a:latin typeface="Times New Roman"/>
                 <a:ea typeface="宋体"/>
               </a:rPr>
-              <a:t>  ★ 核心要点：在垄断竞争市场中，非价格竞争是企业跳出同质化红海、建立自主定价护城河的决胜关键。</a:t>
+              <a:t>★ 核心要点：在垄断竞争市场中，非价格竞争是企业跳出同质化红海、建立自主定价护城河的决胜关键。</a:t>
             </a:r>
           </a:p>
         </p:txBody>
@@ -7045,7 +7045,7 @@
                 <a:latin typeface="Times New Roman"/>
                 <a:ea typeface="宋体"/>
               </a:rPr>
-              <a:t>  跟跌不跟涨假设与边际收入垂直断崖</a:t>
+              <a:t>跟跌不跟涨假设与边际收入垂直断崖</a:t>
             </a:r>
           </a:p>
         </p:txBody>
@@ -7088,7 +7088,7 @@
                 <a:latin typeface="Times New Roman"/>
                 <a:ea typeface="宋体"/>
               </a:rPr>
-              <a:t>（1）寡头核心心理预期（跟跌不跟涨）： </a:t>
+              <a:t>（1）寡头核心心理预期（跟跌不跟涨）：</a:t>
             </a:r>
             <a:r>
               <a:rPr sz="1200" b="0">
@@ -7118,7 +7118,7 @@
                 <a:latin typeface="Times New Roman"/>
                 <a:ea typeface="宋体"/>
               </a:rPr>
-              <a:t>（2）折弯需求曲线： </a:t>
+              <a:t>（2）折弯需求曲线：</a:t>
             </a:r>
             <a:r>
               <a:rPr sz="1200" b="0">
@@ -7128,7 +7128,7 @@
                 <a:latin typeface="Times New Roman"/>
                 <a:ea typeface="宋体"/>
               </a:rPr>
-              <a:t>在现行价格 P_0 处形成拐点，拐点上方平坦弹性大，拐点下方陡峭弹性小。</a:t>
+              <a:t>在现行价格 P₀ 处形成拐点，拐点上方平坦弹性大，拐点下方陡峭弹性小。</a:t>
             </a:r>
           </a:p>
           <a:p>
@@ -7148,7 +7148,7 @@
                 <a:latin typeface="Times New Roman"/>
                 <a:ea typeface="宋体"/>
               </a:rPr>
-              <a:t>（3）边际收入垂直断崖 (BC 垂直间断段)： </a:t>
+              <a:t>（3）边际收入垂直断崖 (BC 垂直间断段)：</a:t>
             </a:r>
             <a:r>
               <a:rPr sz="1200" b="0">
@@ -7178,7 +7178,7 @@
                 <a:latin typeface="Times New Roman"/>
                 <a:ea typeface="宋体"/>
               </a:rPr>
-              <a:t>（4）价格刚性解释： </a:t>
+              <a:t>（4）价格刚性解释：</a:t>
             </a:r>
             <a:r>
               <a:rPr sz="1200" b="0">
@@ -7188,7 +7188,7 @@
                 <a:latin typeface="Times New Roman"/>
                 <a:ea typeface="宋体"/>
               </a:rPr>
-              <a:t>只要边际成本 MC 曲线在垂直断裂区间内上下波动，企业最优价格 P_0 与产量 Q_0 均保持绝对不变！</a:t>
+              <a:t>只要边际成本 MC 曲线在垂直断裂区间内上下波动，企业最优价格 P₀ 与产量 Q₀ 均保持绝对不变！</a:t>
             </a:r>
           </a:p>
         </p:txBody>
@@ -7245,7 +7245,7 @@
                 <a:latin typeface="Times New Roman"/>
                 <a:ea typeface="宋体"/>
               </a:rPr>
-              <a:t>  ★ 理论精要：斯威齐模型深刻解释了为何寡头市场普遍厌恶价格战、倾向于维持价格粘性与转入非价格竞争。</a:t>
+              <a:t>★ 理论精要：斯威齐模型深刻解释了为何寡头市场普遍厌恶价格战、倾向于维持价格粘性与转入非价格竞争。</a:t>
             </a:r>
           </a:p>
         </p:txBody>
@@ -7652,7 +7652,7 @@
                 <a:latin typeface="Times New Roman"/>
                 <a:ea typeface="宋体"/>
               </a:rPr>
-              <a:t>  1. 支配型价格领导（Dominant Firm Model）</a:t>
+              <a:t>1. 支配型价格领导（Dominant Firm Model）</a:t>
             </a:r>
           </a:p>
         </p:txBody>
@@ -7695,7 +7695,7 @@
                 <a:latin typeface="Times New Roman"/>
                 <a:ea typeface="宋体"/>
               </a:rPr>
-              <a:t>（1）市场格局： </a:t>
+              <a:t>（1）市场格局：</a:t>
             </a:r>
             <a:r>
               <a:rPr sz="1250" b="0">
@@ -7725,7 +7725,7 @@
                 <a:latin typeface="Times New Roman"/>
                 <a:ea typeface="宋体"/>
               </a:rPr>
-              <a:t>（2）领导者定价机制： </a:t>
+              <a:t>（2）领导者定价机制：</a:t>
             </a:r>
             <a:r>
               <a:rPr sz="1250" b="0">
@@ -7755,7 +7755,7 @@
                 <a:latin typeface="Times New Roman"/>
                 <a:ea typeface="宋体"/>
               </a:rPr>
-              <a:t>（3）跟随者行为： </a:t>
+              <a:t>（3）跟随者行为：</a:t>
             </a:r>
             <a:r>
               <a:rPr sz="1250" b="0">
@@ -7865,7 +7865,7 @@
                 <a:latin typeface="Times New Roman"/>
                 <a:ea typeface="宋体"/>
               </a:rPr>
-              <a:t>  2. 晴雨表型价格领导（Barometric Firm Model）</a:t>
+              <a:t>2. 晴雨表型价格领导（Barometric Firm Model）</a:t>
             </a:r>
           </a:p>
         </p:txBody>
@@ -7908,7 +7908,7 @@
                 <a:latin typeface="Times New Roman"/>
                 <a:ea typeface="宋体"/>
               </a:rPr>
-              <a:t>（1）运作机制： </a:t>
+              <a:t>（1）运作机制：</a:t>
             </a:r>
             <a:r>
               <a:rPr sz="1250" b="0">
@@ -7938,7 +7938,7 @@
                 <a:latin typeface="Times New Roman"/>
                 <a:ea typeface="宋体"/>
               </a:rPr>
-              <a:t>（2）行业默契跟随： </a:t>
+              <a:t>（2）行业默契跟随：</a:t>
             </a:r>
             <a:r>
               <a:rPr sz="1250" b="0">
@@ -8005,7 +8005,7 @@
                 <a:latin typeface="Times New Roman"/>
                 <a:ea typeface="宋体"/>
               </a:rPr>
-              <a:t>  ★ 核心要点：价格领导模式在不违反反垄断法关于禁止显性串谋的前提下，维持了寡头市场价格秩序的相对稳定。</a:t>
+              <a:t>★ 核心要点：价格领导模式在不违反反垄断法关于禁止显性串谋的前提下，维持了寡头市场价格秩序的相对稳定。</a:t>
             </a:r>
           </a:p>
         </p:txBody>
@@ -8412,7 +8412,7 @@
                 <a:latin typeface="Times New Roman"/>
                 <a:ea typeface="宋体"/>
               </a:rPr>
-              <a:t>  1. 囚徒困境（Prisoner's Dilemma）收益矩阵模型（例6-5）</a:t>
+              <a:t>1. 囚徒困境（Prisoner's Dilemma）收益矩阵模型（例6-5）</a:t>
             </a:r>
           </a:p>
         </p:txBody>
@@ -8455,7 +8455,7 @@
                 <a:latin typeface="Times New Roman"/>
                 <a:ea typeface="宋体"/>
               </a:rPr>
-              <a:t>（1）博弈三要素： </a:t>
+              <a:t>（1）博弈三要素：</a:t>
             </a:r>
             <a:r>
               <a:rPr sz="1150" b="0">
@@ -8485,7 +8485,7 @@
                 <a:latin typeface="Times New Roman"/>
                 <a:ea typeface="宋体"/>
               </a:rPr>
-              <a:t>（2）经典收益矩阵示例： </a:t>
+              <a:t>（2）经典收益矩阵示例：</a:t>
             </a:r>
             <a:r>
               <a:rPr sz="1150" b="0">
@@ -8515,7 +8515,7 @@
                 <a:latin typeface="Times New Roman"/>
                 <a:ea typeface="宋体"/>
               </a:rPr>
-              <a:t>   • 双方合作维持高价： </a:t>
+              <a:t>• 双方合作维持高价：</a:t>
             </a:r>
             <a:r>
               <a:rPr sz="1150" b="0">
@@ -8545,7 +8545,7 @@
                 <a:latin typeface="Times New Roman"/>
                 <a:ea typeface="宋体"/>
               </a:rPr>
-              <a:t>   • 一方降价偷袭、一方坚守： </a:t>
+              <a:t>• 一方降价偷袭、一方坚守：</a:t>
             </a:r>
             <a:r>
               <a:rPr sz="1150" b="0">
@@ -8575,7 +8575,7 @@
                 <a:latin typeface="Times New Roman"/>
                 <a:ea typeface="宋体"/>
               </a:rPr>
-              <a:t>   • 双方均降价打价格战： </a:t>
+              <a:t>• 双方均降价打价格战：</a:t>
             </a:r>
             <a:r>
               <a:rPr sz="1150" b="0">
@@ -8605,7 +8605,7 @@
                 <a:latin typeface="Times New Roman"/>
                 <a:ea typeface="宋体"/>
               </a:rPr>
-              <a:t>（3）占优策略（Dominant Strategy）： </a:t>
+              <a:t>（3）占优策略（Dominant Strategy）：</a:t>
             </a:r>
             <a:r>
               <a:rPr sz="1150" b="0">
@@ -8715,7 +8715,7 @@
                 <a:latin typeface="Times New Roman"/>
                 <a:ea typeface="宋体"/>
               </a:rPr>
-              <a:t>  2. 纳什均衡（Nash Equilibrium）的经济学启示</a:t>
+              <a:t>2. 纳什均衡（Nash Equilibrium）的经济学启示</a:t>
             </a:r>
           </a:p>
         </p:txBody>
@@ -8758,7 +8758,7 @@
                 <a:latin typeface="Times New Roman"/>
                 <a:ea typeface="宋体"/>
               </a:rPr>
-              <a:t>（1）均衡结果： </a:t>
+              <a:t>（1）均衡结果：</a:t>
             </a:r>
             <a:r>
               <a:rPr sz="1250" b="0">
@@ -8788,7 +8788,7 @@
                 <a:latin typeface="Times New Roman"/>
                 <a:ea typeface="宋体"/>
               </a:rPr>
-              <a:t>（2）个体理性与集体理性的深刻冲突： </a:t>
+              <a:t>（2）个体理性与集体理性的深刻冲突：</a:t>
             </a:r>
             <a:r>
               <a:rPr sz="1250" b="0">
@@ -8818,7 +8818,7 @@
                 <a:latin typeface="Times New Roman"/>
                 <a:ea typeface="宋体"/>
               </a:rPr>
-              <a:t>（3）案例6-2 烟草广告禁令启示： </a:t>
+              <a:t>（3）案例6-2 烟草广告禁令启示：</a:t>
             </a:r>
             <a:r>
               <a:rPr sz="1250" b="0">
@@ -8885,7 +8885,7 @@
                 <a:latin typeface="Times New Roman"/>
                 <a:ea typeface="宋体"/>
               </a:rPr>
-              <a:t>  ★ 核心要点：博弈论揭示了寡头战略互动的本质，是现代管理经济学解析竞争战略最核心的数理分析工具。</a:t>
+              <a:t>★ 核心要点：博弈论揭示了寡头战略互动的本质，是现代管理经济学解析竞争战略最核心的数理分析工具。</a:t>
             </a:r>
           </a:p>
         </p:txBody>
@@ -9292,7 +9292,7 @@
                 <a:latin typeface="Times New Roman"/>
                 <a:ea typeface="宋体"/>
               </a:rPr>
-              <a:t>  1. 卡特尔（Cartel）公开价格同盟机制</a:t>
+              <a:t>1. 卡特尔（Cartel）公开价格同盟机制</a:t>
             </a:r>
           </a:p>
         </p:txBody>
@@ -9335,7 +9335,7 @@
                 <a:latin typeface="Times New Roman"/>
                 <a:ea typeface="宋体"/>
               </a:rPr>
-              <a:t>（1）同盟目标： </a:t>
+              <a:t>（1）同盟目标：</a:t>
             </a:r>
             <a:r>
               <a:rPr sz="1250" b="0">
@@ -9365,7 +9365,7 @@
                 <a:latin typeface="Times New Roman"/>
                 <a:ea typeface="宋体"/>
               </a:rPr>
-              <a:t>（2）配额分配原则： </a:t>
+              <a:t>（2）配额分配原则：</a:t>
             </a:r>
             <a:r>
               <a:rPr sz="1250" b="0">
@@ -9375,7 +9375,7 @@
                 <a:latin typeface="Times New Roman"/>
                 <a:ea typeface="宋体"/>
               </a:rPr>
-              <a:t>按各成员边际成本相等的原则分配产量配额（MC_1 = MC_2 = ... = MR_cartel）。</a:t>
+              <a:t>按各成员边际成本相等的原则分配产量配额（MC₁ = MC₂ = ... = MR_cartel）。</a:t>
             </a:r>
           </a:p>
           <a:p>
@@ -9395,7 +9395,7 @@
                 <a:latin typeface="Times New Roman"/>
                 <a:ea typeface="宋体"/>
               </a:rPr>
-              <a:t>（3）典型实证： </a:t>
+              <a:t>（3）典型实证：</a:t>
             </a:r>
             <a:r>
               <a:rPr sz="1250" b="0">
@@ -9505,7 +9505,7 @@
                 <a:latin typeface="Times New Roman"/>
                 <a:ea typeface="宋体"/>
               </a:rPr>
-              <a:t>  2. 内在背叛冲动与卡特尔破裂必然性（例6-4）</a:t>
+              <a:t>2. 内在背叛冲动与卡特尔破裂必然性（例6-4）</a:t>
             </a:r>
           </a:p>
         </p:txBody>
@@ -9548,7 +9548,7 @@
                 <a:latin typeface="Times New Roman"/>
                 <a:ea typeface="宋体"/>
               </a:rPr>
-              <a:t>（1）单边偷产暴利诱惑： </a:t>
+              <a:t>（1）单边偷产暴利诱惑：</a:t>
             </a:r>
             <a:r>
               <a:rPr sz="1250" b="0">
@@ -9578,7 +9578,7 @@
                 <a:latin typeface="Times New Roman"/>
                 <a:ea typeface="宋体"/>
               </a:rPr>
-              <a:t>（2）信任崩塌与同盟瓦解： </a:t>
+              <a:t>（2）信任崩塌与同盟瓦解：</a:t>
             </a:r>
             <a:r>
               <a:rPr sz="1250" b="0">
@@ -9608,7 +9608,7 @@
                 <a:latin typeface="Times New Roman"/>
                 <a:ea typeface="宋体"/>
               </a:rPr>
-              <a:t>（3）维系成功的关键： </a:t>
+              <a:t>（3）维系成功的关键：</a:t>
             </a:r>
             <a:r>
               <a:rPr sz="1250" b="0">
@@ -9675,7 +9675,7 @@
                 <a:latin typeface="Times New Roman"/>
                 <a:ea typeface="宋体"/>
               </a:rPr>
-              <a:t>  ★ 核心要点：卡特尔的内在不稳定性再次印证了囚徒困境定律：缺乏强制约束的共谋同盟终将走向解体。</a:t>
+              <a:t>★ 核心要点：卡特尔的内在不稳定性再次印证了囚徒困境定律：缺乏强制约束的共谋同盟终将走向解体。</a:t>
             </a:r>
           </a:p>
         </p:txBody>
@@ -11984,7 +11984,7 @@
                 <a:latin typeface="Times New Roman"/>
                 <a:ea typeface="宋体"/>
               </a:rPr>
-              <a:t>  1. 职业经理人激励与目标函数偏离</a:t>
+              <a:t>1. 职业经理人激励与目标函数偏离</a:t>
             </a:r>
           </a:p>
         </p:txBody>
@@ -12027,7 +12027,7 @@
                 <a:latin typeface="Times New Roman"/>
                 <a:ea typeface="宋体"/>
               </a:rPr>
-              <a:t>（1）所有权与经营权分离： </a:t>
+              <a:t>（1）所有权与经营权分离：</a:t>
             </a:r>
             <a:r>
               <a:rPr sz="1250" b="0">
@@ -12057,7 +12057,7 @@
                 <a:latin typeface="Times New Roman"/>
                 <a:ea typeface="宋体"/>
               </a:rPr>
-              <a:t>（2）销售收入最大化假说： </a:t>
+              <a:t>（2）销售收入最大化假说：</a:t>
             </a:r>
             <a:r>
               <a:rPr sz="1250" b="0">
@@ -12167,7 +12167,7 @@
                 <a:latin typeface="Times New Roman"/>
                 <a:ea typeface="宋体"/>
               </a:rPr>
-              <a:t>  2. 约束最优化数学模型与对比</a:t>
+              <a:t>2. 约束最优化数学模型与对比</a:t>
             </a:r>
           </a:p>
         </p:txBody>
@@ -12210,7 +12210,7 @@
                 <a:latin typeface="Times New Roman"/>
                 <a:ea typeface="宋体"/>
               </a:rPr>
-              <a:t>（1）最优化模型： </a:t>
+              <a:t>（1）最优化模型：</a:t>
             </a:r>
             <a:r>
               <a:rPr sz="1250" b="0">
@@ -12220,7 +12220,7 @@
                 <a:latin typeface="Times New Roman"/>
                 <a:ea typeface="宋体"/>
               </a:rPr>
-              <a:t>\max TR(Q) = P \cdot Q \quad s.t. \quad \pi(Q) \ge \pi_{min}</a:t>
+              <a:t>max TR(Q) = P · Q s.t. π(Q) ≥ π_min</a:t>
             </a:r>
           </a:p>
           <a:p>
@@ -12240,7 +12240,7 @@
                 <a:latin typeface="Times New Roman"/>
                 <a:ea typeface="宋体"/>
               </a:rPr>
-              <a:t>（2）产销量对比定理： </a:t>
+              <a:t>（2）产销量对比定理：</a:t>
             </a:r>
             <a:r>
               <a:rPr sz="1250" b="0">
@@ -12250,7 +12250,7 @@
                 <a:latin typeface="Times New Roman"/>
                 <a:ea typeface="宋体"/>
               </a:rPr>
-              <a:t>销售收入最大化产销量 Q_{sales}^* 必然大于纯利润最大化产销量 Q_{\pi}^*，且销售价格 P_{sales}^* 必然低于利润最大化价格 P_{\pi}^*！</a:t>
+              <a:t>销售收入最大化产销量 Q*(销售最大) 必然大于纯利润最大化产销量 Q*(利润最大)，且销售价格 P_sales* 必然低于利润最大化价格 P_π*！</a:t>
             </a:r>
           </a:p>
           <a:p>
@@ -12270,7 +12270,7 @@
                 <a:latin typeface="Times New Roman"/>
                 <a:ea typeface="宋体"/>
               </a:rPr>
-              <a:t>（3）生活中的经济学6-3： </a:t>
+              <a:t>（3）生活中的经济学6-3：</a:t>
             </a:r>
             <a:r>
               <a:rPr sz="1250" b="0">
@@ -12337,7 +12337,7 @@
                 <a:latin typeface="Times New Roman"/>
                 <a:ea typeface="宋体"/>
               </a:rPr>
-              <a:t>  ★ 核心要点：鲍莫尔模型深刻揭示了现代巨型企业在规模扩张、市场份额诉求与股东利润底线之间的动态权衡。</a:t>
+              <a:t>★ 核心要点：鲍莫尔模型深刻揭示了现代巨型企业在规模扩张、市场份额诉求与股东利润底线之间的动态权衡。</a:t>
             </a:r>
           </a:p>
         </p:txBody>
@@ -12744,7 +12744,7 @@
                 <a:latin typeface="Times New Roman"/>
                 <a:ea typeface="宋体"/>
               </a:rPr>
-              <a:t>  1. 鲍莫尔可竞争市场理论（Contestable Markets）</a:t>
+              <a:t>1. 鲍莫尔可竞争市场理论（Contestable Markets）</a:t>
             </a:r>
           </a:p>
         </p:txBody>
@@ -12787,7 +12787,7 @@
                 <a:latin typeface="Times New Roman"/>
                 <a:ea typeface="宋体"/>
               </a:rPr>
-              <a:t>（1）核心理论颠覆： </a:t>
+              <a:t>（1）核心理论颠覆：</a:t>
             </a:r>
             <a:r>
               <a:rPr sz="1250" b="0">
@@ -12817,7 +12817,7 @@
                 <a:latin typeface="Times New Roman"/>
                 <a:ea typeface="宋体"/>
               </a:rPr>
-              <a:t>（2）'打了就跑'威慑（Hit-and-Run Entry）： </a:t>
+              <a:t>（2）'打了就跑'威慑（Hit-and-Run Entry）：</a:t>
             </a:r>
             <a:r>
               <a:rPr sz="1250" b="0">
@@ -12847,7 +12847,7 @@
                 <a:latin typeface="Times New Roman"/>
                 <a:ea typeface="宋体"/>
               </a:rPr>
-              <a:t>（3）市场绩效： </a:t>
+              <a:t>（3）市场绩效：</a:t>
             </a:r>
             <a:r>
               <a:rPr sz="1250" b="0">
@@ -12957,7 +12957,7 @@
                 <a:latin typeface="Times New Roman"/>
                 <a:ea typeface="宋体"/>
               </a:rPr>
-              <a:t>  2. 进入吓阻与超额产能投资（案例6-4/6-5）</a:t>
+              <a:t>2. 进入吓阻与超额产能投资（案例6-4/6-5）</a:t>
             </a:r>
           </a:p>
         </p:txBody>
@@ -13000,7 +13000,7 @@
                 <a:latin typeface="Times New Roman"/>
                 <a:ea typeface="宋体"/>
               </a:rPr>
-              <a:t>（1）专用重资产威慑： </a:t>
+              <a:t>（1）专用重资产威慑：</a:t>
             </a:r>
             <a:r>
               <a:rPr sz="1250" b="0">
@@ -13030,7 +13030,7 @@
                 <a:latin typeface="Times New Roman"/>
                 <a:ea typeface="宋体"/>
               </a:rPr>
-              <a:t>（2）国际快递案例： </a:t>
+              <a:t>（2）国际快递案例：</a:t>
             </a:r>
             <a:r>
               <a:rPr sz="1250" b="0">
@@ -13097,7 +13097,7 @@
                 <a:latin typeface="Times New Roman"/>
                 <a:ea typeface="宋体"/>
               </a:rPr>
-              <a:t>  ★ 核心要点：现代产业竞争不仅来自于场内的现存对手，更来自于零沉没成本门槛下的潜在'门口野蛮人'。</a:t>
+              <a:t>★ 核心要点：现代产业竞争不仅来自于场内的现存对手，更来自于零沉没成本门槛下的潜在'门口野蛮人'。</a:t>
             </a:r>
           </a:p>
         </p:txBody>
@@ -13504,7 +13504,7 @@
                 <a:latin typeface="Times New Roman"/>
                 <a:ea typeface="宋体"/>
               </a:rPr>
-              <a:t>  四大市场结构分类</a:t>
+              <a:t>四大市场结构分类</a:t>
             </a:r>
           </a:p>
         </p:txBody>
@@ -13708,7 +13708,7 @@
                 <a:latin typeface="Times New Roman"/>
                 <a:ea typeface="宋体"/>
               </a:rPr>
-              <a:t>  垄断与无谓损失</a:t>
+              <a:t>垄断与无谓损失</a:t>
             </a:r>
           </a:p>
         </p:txBody>
@@ -13912,7 +13912,7 @@
                 <a:latin typeface="Times New Roman"/>
                 <a:ea typeface="宋体"/>
               </a:rPr>
-              <a:t>  寡头博弈与价格刚性</a:t>
+              <a:t>寡头博弈与价格刚性</a:t>
             </a:r>
           </a:p>
         </p:txBody>
@@ -14116,7 +14116,7 @@
                 <a:latin typeface="Times New Roman"/>
                 <a:ea typeface="宋体"/>
               </a:rPr>
-              <a:t>  前沿竞争战略模式</a:t>
+              <a:t>前沿竞争战略模式</a:t>
             </a:r>
           </a:p>
         </p:txBody>
@@ -14277,7 +14277,7 @@
                 <a:latin typeface="Times New Roman"/>
                 <a:ea typeface="宋体"/>
               </a:rPr>
-              <a:t>  ★ 战略结语：市场结构决定企业战略生存空间，深刻洞悉博弈互动规律是寡头企业在存量搏杀中立于不败之地的定海神针。</a:t>
+              <a:t>★ 战略结语：市场结构决定企业战略生存空间，深刻洞悉博弈互动规律是寡头企业在存量搏杀中立于不败之地的定海神针。</a:t>
             </a:r>
           </a:p>
         </p:txBody>
@@ -14684,7 +14684,7 @@
                 <a:latin typeface="Times New Roman"/>
                 <a:ea typeface="宋体"/>
               </a:rPr>
-              <a:t>  课后复习思考题与 MBA 讨论案例（严格对应课本习题）</a:t>
+              <a:t>课后复习思考题与 MBA 讨论案例（严格对应课本习题）</a:t>
             </a:r>
           </a:p>
         </p:txBody>
@@ -14727,7 +14727,7 @@
                 <a:latin typeface="Times New Roman"/>
                 <a:ea typeface="宋体"/>
               </a:rPr>
-              <a:t>1. </a:t>
+              <a:t>1.</a:t>
             </a:r>
             <a:r>
               <a:rPr sz="1150" b="0">
@@ -14757,7 +14757,7 @@
                 <a:latin typeface="Times New Roman"/>
                 <a:ea typeface="宋体"/>
               </a:rPr>
-              <a:t>2. </a:t>
+              <a:t>2.</a:t>
             </a:r>
             <a:r>
               <a:rPr sz="1150" b="0">
@@ -14787,7 +14787,7 @@
                 <a:latin typeface="Times New Roman"/>
                 <a:ea typeface="宋体"/>
               </a:rPr>
-              <a:t>3. </a:t>
+              <a:t>3.</a:t>
             </a:r>
             <a:r>
               <a:rPr sz="1150" b="0">
@@ -14817,7 +14817,7 @@
                 <a:latin typeface="Times New Roman"/>
                 <a:ea typeface="宋体"/>
               </a:rPr>
-              <a:t>4. </a:t>
+              <a:t>4.</a:t>
             </a:r>
             <a:r>
               <a:rPr sz="1150" b="0">
@@ -14847,7 +14847,7 @@
                 <a:latin typeface="Times New Roman"/>
                 <a:ea typeface="宋体"/>
               </a:rPr>
-              <a:t>5. </a:t>
+              <a:t>5.</a:t>
             </a:r>
             <a:r>
               <a:rPr sz="1150" b="0">
@@ -14877,7 +14877,7 @@
                 <a:latin typeface="Times New Roman"/>
                 <a:ea typeface="宋体"/>
               </a:rPr>
-              <a:t>6. </a:t>
+              <a:t>6.</a:t>
             </a:r>
             <a:r>
               <a:rPr sz="1150" b="0">
@@ -14887,7 +14887,7 @@
                 <a:latin typeface="Times New Roman"/>
                 <a:ea typeface="宋体"/>
               </a:rPr>
-              <a:t>【作业题1】某完全垄断企业的需求函数为 P = 100 - 2Q，总成本函数为 TC = 20Q + 0.5Q^2。求该垄断企业利润最大化的价格、产量、垄断利润及社会无谓损失 DWL。</a:t>
+              <a:t>【作业题1】某完全垄断企业的需求函数为 P = 100 - 2Q，总成本函数为 TC = 20Q + 0.5Q²。求该垄断企业利润最大化的价格、产量、垄断利润及社会无谓损失 DWL。</a:t>
             </a:r>
           </a:p>
           <a:p>
@@ -14907,7 +14907,7 @@
                 <a:latin typeface="Times New Roman"/>
                 <a:ea typeface="宋体"/>
               </a:rPr>
-              <a:t>7. </a:t>
+              <a:t>7.</a:t>
             </a:r>
             <a:r>
               <a:rPr sz="1150" b="0">
@@ -17165,7 +17165,7 @@
                 <a:latin typeface="Times New Roman"/>
                 <a:ea typeface="宋体"/>
               </a:rPr>
-              <a:t>  1. 完全竞争个别厂商面临的需求曲线</a:t>
+              <a:t>1. 完全竞争个别厂商面临的需求曲线</a:t>
             </a:r>
           </a:p>
         </p:txBody>
@@ -17208,7 +17208,7 @@
                 <a:latin typeface="Times New Roman"/>
                 <a:ea typeface="宋体"/>
               </a:rPr>
-              <a:t>（1）价格接受者（Price Taker）： </a:t>
+              <a:t>（1）价格接受者（Price Taker）：</a:t>
             </a:r>
             <a:r>
               <a:rPr sz="1250" b="0">
@@ -17218,7 +17218,7 @@
                 <a:latin typeface="Times New Roman"/>
                 <a:ea typeface="宋体"/>
               </a:rPr>
-              <a:t>厂商产量占行业总产量比例微不足道，无法影响市场价格，只能被动接受市场出清价 P^*。</a:t>
+              <a:t>厂商产量占行业总产量比例微不足道，无法影响市场价格，只能被动接受市场出清价 P*。</a:t>
             </a:r>
           </a:p>
           <a:p>
@@ -17238,7 +17238,7 @@
                 <a:latin typeface="Times New Roman"/>
                 <a:ea typeface="宋体"/>
               </a:rPr>
-              <a:t>（2）水平线特征： </a:t>
+              <a:t>（2）水平线特征：</a:t>
             </a:r>
             <a:r>
               <a:rPr sz="1250" b="0">
@@ -17268,7 +17268,7 @@
                 <a:latin typeface="Times New Roman"/>
                 <a:ea typeface="宋体"/>
               </a:rPr>
-              <a:t>（3）短期利润最大化条件： </a:t>
+              <a:t>（3）短期利润最大化条件：</a:t>
             </a:r>
             <a:r>
               <a:rPr sz="1250" b="0">
@@ -17378,7 +17378,7 @@
                 <a:latin typeface="Times New Roman"/>
                 <a:ea typeface="宋体"/>
               </a:rPr>
-              <a:t>  2. 短期停产关门点与供给曲线</a:t>
+              <a:t>2. 短期停产关门点与供给曲线</a:t>
             </a:r>
           </a:p>
         </p:txBody>
@@ -17421,7 +17421,7 @@
                 <a:latin typeface="Times New Roman"/>
                 <a:ea typeface="宋体"/>
               </a:rPr>
-              <a:t>（1）停产关门临界点： </a:t>
+              <a:t>（1）停产关门临界点：</a:t>
             </a:r>
             <a:r>
               <a:rPr sz="1250" b="0">
@@ -17431,7 +17431,7 @@
                 <a:latin typeface="Times New Roman"/>
                 <a:ea typeface="宋体"/>
               </a:rPr>
-              <a:t>当 P = AVC_{min} 时为短期停止营业点。若 P &lt; AVC_{min}，必须立即停产！</a:t>
+              <a:t>当 P = AVC_min 时为短期停止营业点。若 P &lt; AVC_min，必须立即停产！</a:t>
             </a:r>
           </a:p>
           <a:p>
@@ -17451,7 +17451,7 @@
                 <a:latin typeface="Times New Roman"/>
                 <a:ea typeface="宋体"/>
               </a:rPr>
-              <a:t>（2）企业短期供给曲线： </a:t>
+              <a:t>（2）企业短期供给曲线：</a:t>
             </a:r>
             <a:r>
               <a:rPr sz="1250" b="0">
@@ -17481,7 +17481,7 @@
                 <a:latin typeface="Times New Roman"/>
                 <a:ea typeface="宋体"/>
               </a:rPr>
-              <a:t>（3）行业短期供给曲线： </a:t>
+              <a:t>（3）行业短期供给曲线：</a:t>
             </a:r>
             <a:r>
               <a:rPr sz="1250" b="0">
@@ -17548,7 +17548,7 @@
                 <a:latin typeface="Times New Roman"/>
                 <a:ea typeface="宋体"/>
               </a:rPr>
-              <a:t>  ★ 核心要点：在完全竞争短期均衡中，价格等于边际成本是企业实现微观利润最大化的铁律。</a:t>
+              <a:t>★ 核心要点：在完全竞争短期均衡中，价格等于边际成本是企业实现微观利润最大化的铁律。</a:t>
             </a:r>
           </a:p>
         </p:txBody>
@@ -17955,7 +17955,7 @@
                 <a:latin typeface="Times New Roman"/>
                 <a:ea typeface="宋体"/>
               </a:rPr>
-              <a:t>  1. 市场自由进出机制与长期动态调整</a:t>
+              <a:t>1. 市场自由进出机制与长期动态调整</a:t>
             </a:r>
           </a:p>
         </p:txBody>
@@ -17998,7 +17998,7 @@
                 <a:latin typeface="Times New Roman"/>
                 <a:ea typeface="宋体"/>
               </a:rPr>
-              <a:t>（1）超额利润驱动进入： </a:t>
+              <a:t>（1）超额利润驱动进入：</a:t>
             </a:r>
             <a:r>
               <a:rPr sz="1250" b="0">
@@ -18008,7 +18008,7 @@
                 <a:latin typeface="Times New Roman"/>
                 <a:ea typeface="宋体"/>
               </a:rPr>
-              <a:t>若行业存在超额利润 \pi &gt; 0，新外部资本涌入，行业总供给增加，市场价格下跌，直至利润被完全抹平。</a:t>
+              <a:t>若行业存在超额利润 π &gt; 0，新外部资本涌入，行业总供给增加，市场价格下跌，直至利润被完全抹平。</a:t>
             </a:r>
           </a:p>
           <a:p>
@@ -18028,7 +18028,7 @@
                 <a:latin typeface="Times New Roman"/>
                 <a:ea typeface="宋体"/>
               </a:rPr>
-              <a:t>（2）行业亏损迫使退出： </a:t>
+              <a:t>（2）行业亏损迫使退出：</a:t>
             </a:r>
             <a:r>
               <a:rPr sz="1250" b="0">
@@ -18038,7 +18038,7 @@
                 <a:latin typeface="Times New Roman"/>
                 <a:ea typeface="宋体"/>
               </a:rPr>
-              <a:t>若行业亏损 \pi &lt; 0，部分高成本低效企业退出，供给减少推高价格，直至留存企业不再亏损。</a:t>
+              <a:t>若行业亏损 π &lt; 0，部分高成本低效企业退出，供给减少推高价格，直至留存企业不再亏损。</a:t>
             </a:r>
           </a:p>
           <a:p>
@@ -18058,7 +18058,7 @@
                 <a:latin typeface="Times New Roman"/>
                 <a:ea typeface="宋体"/>
               </a:rPr>
-              <a:t>（3）进出壁垒为零： </a:t>
+              <a:t>（3）进出壁垒为零：</a:t>
             </a:r>
             <a:r>
               <a:rPr sz="1250" b="0">
@@ -18168,7 +18168,7 @@
                 <a:latin typeface="Times New Roman"/>
                 <a:ea typeface="宋体"/>
               </a:rPr>
-              <a:t>  2. 长期均衡全要素等式与帕累托最高效率</a:t>
+              <a:t>2. 长期均衡全要素等式与帕累托最高效率</a:t>
             </a:r>
           </a:p>
         </p:txBody>
@@ -18211,7 +18211,7 @@
                 <a:latin typeface="Times New Roman"/>
                 <a:ea typeface="宋体"/>
               </a:rPr>
-              <a:t>（1）长期全要素均衡等式： </a:t>
+              <a:t>（1）长期全要素均衡等式：</a:t>
             </a:r>
             <a:r>
               <a:rPr sz="1250" b="0">
@@ -18221,7 +18221,7 @@
                 <a:latin typeface="Times New Roman"/>
                 <a:ea typeface="宋体"/>
               </a:rPr>
-              <a:t>P = MR = SMC = LMC = SAC_{min} = LAC_{min}</a:t>
+              <a:t>P = MR = SMC = LMC = SAC_min = LAC_min</a:t>
             </a:r>
           </a:p>
           <a:p>
@@ -18241,7 +18241,7 @@
                 <a:latin typeface="Times New Roman"/>
                 <a:ea typeface="宋体"/>
               </a:rPr>
-              <a:t>（2）生产效率达到极致： </a:t>
+              <a:t>（2）生产效率达到极致：</a:t>
             </a:r>
             <a:r>
               <a:rPr sz="1250" b="0">
@@ -18271,7 +18271,7 @@
                 <a:latin typeface="Times New Roman"/>
                 <a:ea typeface="宋体"/>
               </a:rPr>
-              <a:t>（3）配置效率达到极致： </a:t>
+              <a:t>（3）配置效率达到极致：</a:t>
             </a:r>
             <a:r>
               <a:rPr sz="1250" b="0">
@@ -18338,7 +18338,7 @@
                 <a:latin typeface="Times New Roman"/>
                 <a:ea typeface="宋体"/>
               </a:rPr>
-              <a:t>  ★ 核心要点：完全竞争市场实现了亚当·斯密'看不见的手'的最完美帕累托最优资源配置境界。</a:t>
+              <a:t>★ 核心要点：完全竞争市场实现了亚当·斯密'看不见的手'的最完美帕累托最优资源配置境界。</a:t>
             </a:r>
           </a:p>
         </p:txBody>
@@ -19052,7 +19052,7 @@
                 <a:latin typeface="Times New Roman"/>
                 <a:ea typeface="宋体"/>
               </a:rPr>
-              <a:t>  1. 规模经济与关键资源独占</a:t>
+              <a:t>1. 规模经济与关键资源独占</a:t>
             </a:r>
           </a:p>
         </p:txBody>
@@ -19095,7 +19095,7 @@
                 <a:latin typeface="Times New Roman"/>
                 <a:ea typeface="宋体"/>
               </a:rPr>
-              <a:t>（1）规模经济（自然垄断）： </a:t>
+              <a:t>（1）规模经济（自然垄断）：</a:t>
             </a:r>
             <a:r>
               <a:rPr sz="1200" b="0">
@@ -19125,7 +19125,7 @@
                 <a:latin typeface="Times New Roman"/>
                 <a:ea typeface="宋体"/>
               </a:rPr>
-              <a:t>（2）关键原材料绝对控制： </a:t>
+              <a:t>（2）关键原材料绝对控制：</a:t>
             </a:r>
             <a:r>
               <a:rPr sz="1200" b="0">
@@ -19235,7 +19235,7 @@
                 <a:latin typeface="Times New Roman"/>
                 <a:ea typeface="宋体"/>
               </a:rPr>
-              <a:t>  2. 专利技术与政府特许经营</a:t>
+              <a:t>2. 专利技术与政府特许经营</a:t>
             </a:r>
           </a:p>
         </p:txBody>
@@ -19278,7 +19278,7 @@
                 <a:latin typeface="Times New Roman"/>
                 <a:ea typeface="宋体"/>
               </a:rPr>
-              <a:t>（3）专利权与专有技术壁垒： </a:t>
+              <a:t>（3）专利权与专有技术壁垒：</a:t>
             </a:r>
             <a:r>
               <a:rPr sz="1200" b="0">
@@ -19308,7 +19308,7 @@
                 <a:latin typeface="Times New Roman"/>
                 <a:ea typeface="宋体"/>
               </a:rPr>
-              <a:t>（4）政府特许经营行政牌照： </a:t>
+              <a:t>（4）政府特许经营行政牌照：</a:t>
             </a:r>
             <a:r>
               <a:rPr sz="1200" b="0">
@@ -19418,7 +19418,7 @@
                 <a:latin typeface="Times New Roman"/>
                 <a:ea typeface="宋体"/>
               </a:rPr>
-              <a:t>  3. 巨额资本与战略壁垒</a:t>
+              <a:t>3. 巨额资本与战略壁垒</a:t>
             </a:r>
           </a:p>
         </p:txBody>
@@ -19461,7 +19461,7 @@
                 <a:latin typeface="Times New Roman"/>
                 <a:ea typeface="宋体"/>
               </a:rPr>
-              <a:t>（5）巨额资本壁垒与沉没成本： </a:t>
+              <a:t>（5）巨额资本壁垒与沉没成本：</a:t>
             </a:r>
             <a:r>
               <a:rPr sz="1200" b="0">
@@ -19528,7 +19528,7 @@
                 <a:latin typeface="Times New Roman"/>
                 <a:ea typeface="宋体"/>
               </a:rPr>
-              <a:t>  ★ 核心要点：五大进入壁垒彻底封死了潜在竞争者的进入通道，赋予了垄断厂商长期独占超额利润的特权。</a:t>
+              <a:t>★ 核心要点：五大进入壁垒彻底封死了潜在竞争者的进入通道，赋予了垄断厂商长期独占超额利润的特权。</a:t>
             </a:r>
           </a:p>
         </p:txBody>
